--- a/Final.pptx
+++ b/Final.pptx
@@ -16,7 +16,7 @@
     <p:sldId id="261" r:id="rId7"/>
     <p:sldId id="262" r:id="rId8"/>
     <p:sldId id="263" r:id="rId9"/>
-    <p:sldId id="264" r:id="rId10"/>
+    <p:sldId id="271" r:id="rId10"/>
     <p:sldId id="265" r:id="rId11"/>
     <p:sldId id="266" r:id="rId12"/>
     <p:sldId id="267" r:id="rId13"/>
@@ -25367,15 +25367,7 @@
 
 <file path=ppt/slides/slide9.xml><?xml version="1.0" encoding="utf-8"?>
 <p:sld xmlns:a="http://schemas.openxmlformats.org/drawingml/2006/main" xmlns:r="http://schemas.openxmlformats.org/officeDocument/2006/relationships" xmlns:p="http://schemas.openxmlformats.org/presentationml/2006/main">
-  <p:cSld name="Slide 9">
-    <p:bg>
-      <p:bgPr>
-        <a:solidFill>
-          <a:srgbClr val="F8FAFC"/>
-        </a:solidFill>
-        <a:effectLst/>
-      </p:bgPr>
-    </p:bg>
+  <p:cSld>
     <p:spTree>
       <p:nvGrpSpPr>
         <p:cNvPr id="1" name=""/>
@@ -25464,13 +25456,7 @@
           <p:cNvGraphicFramePr>
             <a:graphicFrameLocks noGrp="1"/>
           </p:cNvGraphicFramePr>
-          <p:nvPr>
-            <p:extLst>
-              <p:ext uri="{D42A27DB-BD31-4B8C-83A1-F6EECF244321}">
-                <p14:modId xmlns:p14="http://schemas.microsoft.com/office/powerpoint/2010/main" val="1579011935"/>
-              </p:ext>
-            </p:extLst>
-          </p:nvPr>
+          <p:nvPr/>
         </p:nvGraphicFramePr>
         <p:xfrm>
           <a:off x="365760" y="960120"/>
@@ -25778,26 +25764,20 @@
                         <a:buNone/>
                       </a:pPr>
                       <a:r>
-                        <a:rPr lang="en-US" sz="1100" dirty="0">
+                        <a:rPr lang="en-US" sz="1100" dirty="0" err="1">
                           <a:solidFill>
                             <a:srgbClr val="64748B"/>
                           </a:solidFill>
                         </a:rPr>
-                        <a:t>BioBERT fine-tuning</a:t>
+                        <a:t>BioBERT</a:t>
                       </a:r>
-                      <a:endParaRPr lang="en-US" sz="1100" dirty="0"/>
-                    </a:p>
-                    <a:p>
-                      <a:pPr marL="0" indent="0">
-                        <a:buNone/>
-                      </a:pPr>
                       <a:r>
                         <a:rPr lang="en-US" sz="1100" dirty="0">
                           <a:solidFill>
                             <a:srgbClr val="64748B"/>
                           </a:solidFill>
                         </a:rPr>
-                        <a:t>Evaluation pipeline</a:t>
+                        <a:t> fine-tuning</a:t>
                       </a:r>
                       <a:endParaRPr lang="en-US" sz="1100" dirty="0"/>
                     </a:p>
@@ -25825,7 +25805,21 @@
                             <a:srgbClr val="64748B"/>
                           </a:solidFill>
                         </a:rPr>
-                        <a:t>GitHub repository</a:t>
+                        <a:t>Statistical analysis</a:t>
+                      </a:r>
+                      <a:endParaRPr lang="en-US" sz="1100" dirty="0"/>
+                    </a:p>
+                    <a:p>
+                      <a:pPr marL="0" indent="0">
+                        <a:buNone/>
+                      </a:pPr>
+                      <a:r>
+                        <a:rPr lang="en-US" sz="1100" dirty="0">
+                          <a:solidFill>
+                            <a:srgbClr val="64748B"/>
+                          </a:solidFill>
+                        </a:rPr>
+                        <a:t>Confidence scoring</a:t>
                       </a:r>
                       <a:endParaRPr lang="en-US" sz="1100" dirty="0"/>
                     </a:p>
@@ -25886,7 +25880,23 @@
                             <a:srgbClr val="64748B"/>
                           </a:solidFill>
                         </a:rPr>
-                        <a:t>Model training (96.2% acc), batched inference, drug/symptom masking implementation, confidence score analysis, statistical tests (McNemar, bootstrap CIs)</a:t>
+                        <a:t>Model training (96.2% acc), drug/symptom masking pipeline, </a:t>
+                      </a:r>
+                      <a:r>
+                        <a:rPr lang="en-US" sz="1000" dirty="0" err="1">
+                          <a:solidFill>
+                            <a:srgbClr val="64748B"/>
+                          </a:solidFill>
+                        </a:rPr>
+                        <a:t>McNemar</a:t>
+                      </a:r>
+                      <a:r>
+                        <a:rPr lang="en-US" sz="1000" dirty="0">
+                          <a:solidFill>
+                            <a:srgbClr val="64748B"/>
+                          </a:solidFill>
+                        </a:rPr>
+                        <a:t> test, bootstrap CIs, Wilson CIs, Family C symptom masking, sensitivity ratio computation</a:t>
                       </a:r>
                       <a:endParaRPr lang="en-US" sz="1000" dirty="0"/>
                     </a:p>
@@ -26029,7 +26039,29 @@
                             <a:srgbClr val="64748B"/>
                           </a:solidFill>
                         </a:rPr>
-                        <a:t>Counterfactual generation</a:t>
+                        <a:t>Family B brand substitution</a:t>
+                      </a:r>
+                      <a:endParaRPr lang="en-US" sz="1100" dirty="0"/>
+                    </a:p>
+                    <a:p>
+                      <a:pPr marL="0" indent="0">
+                        <a:buNone/>
+                      </a:pPr>
+                      <a:r>
+                        <a:rPr lang="en-US" sz="1100" dirty="0" err="1">
+                          <a:solidFill>
+                            <a:srgbClr val="64748B"/>
+                          </a:solidFill>
+                        </a:rPr>
+                        <a:t>RxNorm</a:t>
+                      </a:r>
+                      <a:r>
+                        <a:rPr lang="en-US" sz="1100" dirty="0">
+                          <a:solidFill>
+                            <a:srgbClr val="64748B"/>
+                          </a:solidFill>
+                        </a:rPr>
+                        <a:t> API pipeline</a:t>
                       </a:r>
                       <a:endParaRPr lang="en-US" sz="1100" dirty="0"/>
                     </a:p>
@@ -26043,7 +26075,7 @@
                             <a:srgbClr val="64748B"/>
                           </a:solidFill>
                         </a:rPr>
-                        <a:t>Family B (brand sub)</a:t>
+                        <a:t>SHAP &amp; IG analysis</a:t>
                       </a:r>
                       <a:endParaRPr lang="en-US" sz="1100" dirty="0"/>
                     </a:p>
@@ -26052,21 +26084,7 @@
                         <a:buNone/>
                       </a:pPr>
                       <a:r>
-                        <a:rPr lang="en-US" sz="1100" dirty="0">
-                          <a:solidFill>
-                            <a:srgbClr val="64748B"/>
-                          </a:solidFill>
-                        </a:rPr>
-                        <a:t>RxNorm API mapping</a:t>
-                      </a:r>
-                      <a:endParaRPr lang="en-US" sz="1100" dirty="0"/>
-                    </a:p>
-                    <a:p>
-                      <a:pPr marL="0" indent="0">
-                        <a:buNone/>
-                      </a:pPr>
-                      <a:r>
-                        <a:rPr lang="en-US" sz="1100" dirty="0">
+                        <a:rPr lang="en-US" sz="1100">
                           <a:solidFill>
                             <a:srgbClr val="64748B"/>
                           </a:solidFill>
@@ -26127,12 +26145,20 @@
                         <a:buNone/>
                       </a:pPr>
                       <a:r>
+                        <a:rPr lang="en-US" sz="1000" dirty="0" err="1">
+                          <a:solidFill>
+                            <a:srgbClr val="64748B"/>
+                          </a:solidFill>
+                        </a:rPr>
+                        <a:t>RxNorm</a:t>
+                      </a:r>
+                      <a:r>
                         <a:rPr lang="en-US" sz="1000" dirty="0">
                           <a:solidFill>
                             <a:srgbClr val="64748B"/>
                           </a:solidFill>
                         </a:rPr>
-                        <a:t>RxNorm brand mapping pipeline (540/1049 generics), brand substitution experiments, minimality analysis (82% single-drug finding), SHAP interaction analysis</a:t>
+                        <a:t> brand mapping (540 generics), brand substitution experiments, SHAP token attribution (6,821 sentences), Integrated Gradients (6,821 sentences), minimality analysis</a:t>
                       </a:r>
                       <a:endParaRPr lang="en-US" sz="1000" dirty="0"/>
                     </a:p>
@@ -26275,49 +26301,52 @@
                             <a:srgbClr val="64748B"/>
                           </a:solidFill>
                         </a:rPr>
-                        <a:t>SHAP / LIME / IG analysis</a:t>
+                        <a:t>LIME attribution </a:t>
                       </a:r>
-                      <a:endParaRPr lang="en-US" sz="1100" dirty="0"/>
-                    </a:p>
-                    <a:p>
-                      <a:pPr marL="0" indent="0">
-                        <a:buNone/>
-                      </a:pPr>
+                      <a:br>
+                        <a:rPr lang="en-US" sz="1100" dirty="0">
+                          <a:solidFill>
+                            <a:srgbClr val="64748B"/>
+                          </a:solidFill>
+                        </a:rPr>
+                      </a:br>
                       <a:r>
                         <a:rPr lang="en-US" sz="1100" dirty="0">
                           <a:solidFill>
                             <a:srgbClr val="64748B"/>
                           </a:solidFill>
                         </a:rPr>
-                        <a:t>Negation counterfactuals</a:t>
+                        <a:t>Negation counterfactuals </a:t>
                       </a:r>
-                      <a:endParaRPr lang="en-US" sz="1100" dirty="0"/>
-                    </a:p>
-                    <a:p>
-                      <a:pPr marL="0" indent="0">
-                        <a:buNone/>
-                      </a:pPr>
+                      <a:br>
+                        <a:rPr lang="en-US" sz="1100" dirty="0">
+                          <a:solidFill>
+                            <a:srgbClr val="64748B"/>
+                          </a:solidFill>
+                        </a:rPr>
+                      </a:br>
                       <a:r>
                         <a:rPr lang="en-US" sz="1100" dirty="0">
                           <a:solidFill>
                             <a:srgbClr val="64748B"/>
                           </a:solidFill>
                         </a:rPr>
-                        <a:t>Attention visualization</a:t>
+                        <a:t>Attention analysis </a:t>
                       </a:r>
-                      <a:endParaRPr lang="en-US" sz="1100" dirty="0"/>
-                    </a:p>
-                    <a:p>
-                      <a:pPr marL="0" indent="0">
-                        <a:buNone/>
-                      </a:pPr>
+                      <a:br>
+                        <a:rPr lang="en-US" sz="1100" dirty="0">
+                          <a:solidFill>
+                            <a:srgbClr val="64748B"/>
+                          </a:solidFill>
+                        </a:rPr>
+                      </a:br>
                       <a:r>
                         <a:rPr lang="en-US" sz="1100" dirty="0">
                           <a:solidFill>
                             <a:srgbClr val="64748B"/>
                           </a:solidFill>
                         </a:rPr>
-                        <a:t>Figures &amp; write-up</a:t>
+                        <a:t>SHAP interaction &amp; error patterns</a:t>
                       </a:r>
                       <a:endParaRPr lang="en-US" sz="1100" dirty="0"/>
                     </a:p>
@@ -26378,7 +26407,7 @@
                             <a:srgbClr val="64748B"/>
                           </a:solidFill>
                         </a:rPr>
-                        <a:t>SHAP, LIME, Integrated Gradients implementation, negation counterfactual experiments, attention heatmaps, all 8 result figures, final report</a:t>
+                        <a:t>LIME attribution on 6,821 sentences (500 perturbations each), negation experiments (300 sentences, 10 patterns), attention extraction (50 sentences, 12 heads), SHAP interaction analysis, error pattern segmentation</a:t>
                       </a:r>
                       <a:endParaRPr lang="en-US" sz="1000" dirty="0"/>
                     </a:p>
